--- a/topic04-functions-and-lambda-calculus/unit-04a-lectures/talk-1/a-functions.pptx
+++ b/topic04-functions-and-lambda-calculus/unit-04a-lectures/talk-1/a-functions.pptx
@@ -548,14 +548,14 @@
           </a:ln>
           <a:extLst>
             <a:ext uri="{909E8E84-426E-40dd-AFC4-6F175D3DCCD1}">
-              <a14:hiddenFill xmlns="" xmlns:a14="http://schemas.microsoft.com/office/drawing/2010/main">
+              <a14:hiddenFill xmlns:a14="http://schemas.microsoft.com/office/drawing/2010/main" xmlns="">
                 <a:solidFill>
                   <a:srgbClr val="FFFFFF"/>
                 </a:solidFill>
               </a14:hiddenFill>
             </a:ext>
             <a:ext uri="{FAA26D3D-D897-4be2-8F04-BA451C77F1D7}">
-              <ma14:placeholderFlag xmlns="" xmlns:ma14="http://schemas.microsoft.com/office/mac/drawingml/2011/main" val="1"/>
+              <ma14:placeholderFlag xmlns:ma14="http://schemas.microsoft.com/office/mac/drawingml/2011/main" xmlns="" val="1"/>
             </a:ext>
           </a:extLst>
         </p:spPr>
@@ -889,14 +889,14 @@
           <a:noFill/>
           <a:extLst>
             <a:ext uri="{909E8E84-426E-40dd-AFC4-6F175D3DCCD1}">
-              <a14:hiddenFill xmlns="" xmlns:a14="http://schemas.microsoft.com/office/drawing/2010/main">
+              <a14:hiddenFill xmlns:a14="http://schemas.microsoft.com/office/drawing/2010/main" xmlns="">
                 <a:solidFill>
                   <a:srgbClr val="FFFFFF"/>
                 </a:solidFill>
               </a14:hiddenFill>
             </a:ext>
             <a:ext uri="{91240B29-F687-4f45-9708-019B960494DF}">
-              <a14:hiddenLine xmlns="" xmlns:a14="http://schemas.microsoft.com/office/drawing/2010/main" w="9525">
+              <a14:hiddenLine xmlns:a14="http://schemas.microsoft.com/office/drawing/2010/main" xmlns="" w="9525">
                 <a:solidFill>
                   <a:srgbClr val="000000"/>
                 </a:solidFill>
@@ -1104,14 +1104,14 @@
           <a:noFill/>
           <a:extLst>
             <a:ext uri="{909E8E84-426E-40dd-AFC4-6F175D3DCCD1}">
-              <a14:hiddenFill xmlns="" xmlns:a14="http://schemas.microsoft.com/office/drawing/2010/main">
+              <a14:hiddenFill xmlns:a14="http://schemas.microsoft.com/office/drawing/2010/main" xmlns="">
                 <a:solidFill>
                   <a:srgbClr val="FFFFFF"/>
                 </a:solidFill>
               </a14:hiddenFill>
             </a:ext>
             <a:ext uri="{91240B29-F687-4f45-9708-019B960494DF}">
-              <a14:hiddenLine xmlns="" xmlns:a14="http://schemas.microsoft.com/office/drawing/2010/main" w="9525">
+              <a14:hiddenLine xmlns:a14="http://schemas.microsoft.com/office/drawing/2010/main" xmlns="" w="9525">
                 <a:solidFill>
                   <a:srgbClr val="000000"/>
                 </a:solidFill>
@@ -1568,7 +1568,7 @@
             <a:fld id="{08B9EBBA-996F-894A-B54A-D6246ED52CEA}" type="datetimeFigureOut">
               <a:rPr lang="en-US" smtClean="0"/>
               <a:pPr/>
-              <a:t>1/27/26</a:t>
+              <a:t>3/27/26</a:t>
             </a:fld>
             <a:endParaRPr lang="en-US" dirty="0"/>
           </a:p>
@@ -1990,7 +1990,7 @@
             <a:fld id="{09B482E8-6E0E-1B4F-B1FD-C69DB9E858D9}" type="datetimeFigureOut">
               <a:rPr lang="en-US" smtClean="0"/>
               <a:pPr/>
-              <a:t>1/27/26</a:t>
+              <a:t>3/27/26</a:t>
             </a:fld>
             <a:endParaRPr lang="en-US" dirty="0"/>
           </a:p>
@@ -2334,7 +2334,7 @@
             <a:fld id="{09B482E8-6E0E-1B4F-B1FD-C69DB9E858D9}" type="datetimeFigureOut">
               <a:rPr lang="en-US" smtClean="0"/>
               <a:pPr/>
-              <a:t>1/27/26</a:t>
+              <a:t>3/27/26</a:t>
             </a:fld>
             <a:endParaRPr lang="en-US" dirty="0"/>
           </a:p>
@@ -2747,7 +2747,7 @@
             <a:fld id="{09B482E8-6E0E-1B4F-B1FD-C69DB9E858D9}" type="datetimeFigureOut">
               <a:rPr lang="en-US" smtClean="0"/>
               <a:pPr/>
-              <a:t>1/27/26</a:t>
+              <a:t>3/27/26</a:t>
             </a:fld>
             <a:endParaRPr lang="en-US" dirty="0"/>
           </a:p>
@@ -3323,7 +3323,7 @@
             <a:fld id="{09B482E8-6E0E-1B4F-B1FD-C69DB9E858D9}" type="datetimeFigureOut">
               <a:rPr lang="en-US" smtClean="0"/>
               <a:pPr/>
-              <a:t>1/27/26</a:t>
+              <a:t>3/27/26</a:t>
             </a:fld>
             <a:endParaRPr lang="en-US" dirty="0"/>
           </a:p>
@@ -4012,7 +4012,7 @@
             <a:fld id="{09B482E8-6E0E-1B4F-B1FD-C69DB9E858D9}" type="datetimeFigureOut">
               <a:rPr lang="en-US" smtClean="0"/>
               <a:pPr/>
-              <a:t>1/27/26</a:t>
+              <a:t>3/27/26</a:t>
             </a:fld>
             <a:endParaRPr lang="en-US" dirty="0"/>
           </a:p>
@@ -4933,7 +4933,7 @@
             <a:fld id="{09B482E8-6E0E-1B4F-B1FD-C69DB9E858D9}" type="datetimeFigureOut">
               <a:rPr lang="en-US" smtClean="0"/>
               <a:pPr/>
-              <a:t>1/27/26</a:t>
+              <a:t>3/27/26</a:t>
             </a:fld>
             <a:endParaRPr lang="en-US" dirty="0"/>
           </a:p>
@@ -5254,7 +5254,7 @@
             <a:fld id="{09B482E8-6E0E-1B4F-B1FD-C69DB9E858D9}" type="datetimeFigureOut">
               <a:rPr lang="en-US" smtClean="0"/>
               <a:pPr/>
-              <a:t>1/27/26</a:t>
+              <a:t>3/27/26</a:t>
             </a:fld>
             <a:endParaRPr lang="en-US" dirty="0"/>
           </a:p>
@@ -5525,7 +5525,7 @@
             <a:fld id="{09B482E8-6E0E-1B4F-B1FD-C69DB9E858D9}" type="datetimeFigureOut">
               <a:rPr lang="en-US" smtClean="0"/>
               <a:pPr/>
-              <a:t>1/27/26</a:t>
+              <a:t>3/27/26</a:t>
             </a:fld>
             <a:endParaRPr lang="en-US" dirty="0"/>
           </a:p>
@@ -5723,6 +5723,13 @@
             <a:schemeClr val="lt1"/>
           </a:fontRef>
         </p:style>
+        <p:txBody>
+          <a:bodyPr/>
+          <a:lstStyle/>
+          <a:p>
+            <a:endParaRPr lang="en-US"/>
+          </a:p>
+        </p:txBody>
       </p:sp>
       <p:sp>
         <p:nvSpPr>
@@ -5761,6 +5768,13 @@
             <a:schemeClr val="lt1"/>
           </a:fontRef>
         </p:style>
+        <p:txBody>
+          <a:bodyPr/>
+          <a:lstStyle/>
+          <a:p>
+            <a:endParaRPr lang="en-US"/>
+          </a:p>
+        </p:txBody>
       </p:sp>
       <p:sp>
         <p:nvSpPr>
@@ -5855,7 +5869,7 @@
             <a:fld id="{09B482E8-6E0E-1B4F-B1FD-C69DB9E858D9}" type="datetimeFigureOut">
               <a:rPr lang="en-US" smtClean="0"/>
               <a:pPr/>
-              <a:t>1/27/26</a:t>
+              <a:t>3/27/26</a:t>
             </a:fld>
             <a:endParaRPr lang="en-US" dirty="0"/>
           </a:p>
@@ -6251,7 +6265,7 @@
             <a:fld id="{8DFA1846-DA80-1C48-A609-854EA85C59AD}" type="datetimeFigureOut">
               <a:rPr lang="en-US" smtClean="0"/>
               <a:pPr/>
-              <a:t>1/27/26</a:t>
+              <a:t>3/27/26</a:t>
             </a:fld>
             <a:endParaRPr lang="en-US" dirty="0"/>
           </a:p>
@@ -6440,6 +6454,13 @@
             <a:schemeClr val="lt1"/>
           </a:fontRef>
         </p:style>
+        <p:txBody>
+          <a:bodyPr/>
+          <a:lstStyle/>
+          <a:p>
+            <a:endParaRPr lang="en-US"/>
+          </a:p>
+        </p:txBody>
       </p:sp>
       <p:sp>
         <p:nvSpPr>
@@ -6478,6 +6499,13 @@
             <a:schemeClr val="lt1"/>
           </a:fontRef>
         </p:style>
+        <p:txBody>
+          <a:bodyPr/>
+          <a:lstStyle/>
+          <a:p>
+            <a:endParaRPr lang="en-US"/>
+          </a:p>
+        </p:txBody>
       </p:sp>
       <p:sp>
         <p:nvSpPr>
@@ -6634,7 +6662,7 @@
             <a:fld id="{09B482E8-6E0E-1B4F-B1FD-C69DB9E858D9}" type="datetimeFigureOut">
               <a:rPr lang="en-US" smtClean="0"/>
               <a:pPr/>
-              <a:t>1/27/26</a:t>
+              <a:t>3/27/26</a:t>
             </a:fld>
             <a:endParaRPr lang="en-US" dirty="0"/>
           </a:p>
@@ -7147,7 +7175,7 @@
             <a:fld id="{09B482E8-6E0E-1B4F-B1FD-C69DB9E858D9}" type="datetimeFigureOut">
               <a:rPr lang="en-US" smtClean="0"/>
               <a:pPr/>
-              <a:t>1/27/26</a:t>
+              <a:t>3/27/26</a:t>
             </a:fld>
             <a:endParaRPr lang="en-US" dirty="0"/>
           </a:p>
@@ -7331,6 +7359,13 @@
             <a:schemeClr val="lt1"/>
           </a:fontRef>
         </p:style>
+        <p:txBody>
+          <a:bodyPr/>
+          <a:lstStyle/>
+          <a:p>
+            <a:endParaRPr lang="en-US"/>
+          </a:p>
+        </p:txBody>
       </p:sp>
       <p:sp>
         <p:nvSpPr>
@@ -7369,6 +7404,13 @@
             <a:schemeClr val="lt1"/>
           </a:fontRef>
         </p:style>
+        <p:txBody>
+          <a:bodyPr/>
+          <a:lstStyle/>
+          <a:p>
+            <a:endParaRPr lang="en-US"/>
+          </a:p>
+        </p:txBody>
       </p:sp>
       <p:sp>
         <p:nvSpPr>
@@ -7411,7 +7453,7 @@
             <a:fld id="{F13A34C8-038E-2045-AF43-DF7DBB8E0E9E}" type="datetimeFigureOut">
               <a:rPr lang="en-US" smtClean="0"/>
               <a:pPr/>
-              <a:t>1/27/26</a:t>
+              <a:t>3/27/26</a:t>
             </a:fld>
             <a:endParaRPr lang="en-US" dirty="0"/>
           </a:p>
@@ -7588,7 +7630,7 @@
             <a:fld id="{8818C68F-D26B-8F47-958C-23B49CF8A634}" type="datetimeFigureOut">
               <a:rPr lang="en-US" smtClean="0"/>
               <a:pPr/>
-              <a:t>1/27/26</a:t>
+              <a:t>3/27/26</a:t>
             </a:fld>
             <a:endParaRPr lang="en-US" dirty="0"/>
           </a:p>
@@ -7985,7 +8027,7 @@
             <a:fld id="{09B482E8-6E0E-1B4F-B1FD-C69DB9E858D9}" type="datetimeFigureOut">
               <a:rPr lang="en-US" smtClean="0"/>
               <a:pPr/>
-              <a:t>1/27/26</a:t>
+              <a:t>3/27/26</a:t>
             </a:fld>
             <a:endParaRPr lang="en-US" dirty="0"/>
           </a:p>
@@ -8401,7 +8443,7 @@
             <a:fld id="{09B482E8-6E0E-1B4F-B1FD-C69DB9E858D9}" type="datetimeFigureOut">
               <a:rPr lang="en-US" smtClean="0"/>
               <a:pPr/>
-              <a:t>1/27/26</a:t>
+              <a:t>3/27/26</a:t>
             </a:fld>
             <a:endParaRPr lang="en-US" dirty="0"/>
           </a:p>
@@ -8652,7 +8694,7 @@
             <a:fld id="{09B482E8-6E0E-1B4F-B1FD-C69DB9E858D9}" type="datetimeFigureOut">
               <a:rPr lang="en-US" smtClean="0"/>
               <a:pPr/>
-              <a:t>1/27/26</a:t>
+              <a:t>3/27/26</a:t>
             </a:fld>
             <a:endParaRPr lang="en-US" dirty="0"/>
           </a:p>
@@ -9089,14 +9131,14 @@
           <a:noFill/>
           <a:extLst>
             <a:ext uri="{909E8E84-426E-40dd-AFC4-6F175D3DCCD1}">
-              <a14:hiddenFill xmlns="" xmlns:a14="http://schemas.microsoft.com/office/drawing/2010/main">
+              <a14:hiddenFill xmlns:a14="http://schemas.microsoft.com/office/drawing/2010/main" xmlns="">
                 <a:solidFill>
                   <a:srgbClr val="FFFFFF"/>
                 </a:solidFill>
               </a14:hiddenFill>
             </a:ext>
             <a:ext uri="{91240B29-F687-4f45-9708-019B960494DF}">
-              <a14:hiddenLine xmlns="" xmlns:a14="http://schemas.microsoft.com/office/drawing/2010/main" w="9525">
+              <a14:hiddenLine xmlns:a14="http://schemas.microsoft.com/office/drawing/2010/main" xmlns="" w="9525">
                 <a:solidFill>
                   <a:srgbClr val="000000"/>
                 </a:solidFill>
@@ -9350,14 +9392,14 @@
           </a:ln>
           <a:extLst>
             <a:ext uri="{909E8E84-426E-40dd-AFC4-6F175D3DCCD1}">
-              <a14:hiddenFill xmlns="" xmlns:a14="http://schemas.microsoft.com/office/drawing/2010/main">
+              <a14:hiddenFill xmlns:a14="http://schemas.microsoft.com/office/drawing/2010/main" xmlns="">
                 <a:solidFill>
                   <a:srgbClr val="FFFFFF"/>
                 </a:solidFill>
               </a14:hiddenFill>
             </a:ext>
             <a:ext uri="{91240B29-F687-4f45-9708-019B960494DF}">
-              <a14:hiddenLine xmlns="" xmlns:a14="http://schemas.microsoft.com/office/drawing/2010/main" w="9525">
+              <a14:hiddenLine xmlns:a14="http://schemas.microsoft.com/office/drawing/2010/main" xmlns="" w="9525">
                 <a:solidFill>
                   <a:srgbClr val="000000"/>
                 </a:solidFill>
@@ -9443,14 +9485,14 @@
         <p:spPr>
           <a:extLst>
             <a:ext uri="{909E8E84-426E-40dd-AFC4-6F175D3DCCD1}">
-              <a14:hiddenFill xmlns:a14="http://schemas.microsoft.com/office/drawing/2010/main" xmlns="">
+              <a14:hiddenFill xmlns="" xmlns:a14="http://schemas.microsoft.com/office/drawing/2010/main">
                 <a:solidFill>
                   <a:srgbClr val="FFFFFF"/>
                 </a:solidFill>
               </a14:hiddenFill>
             </a:ext>
             <a:ext uri="{91240B29-F687-4f45-9708-019B960494DF}">
-              <a14:hiddenLine xmlns:a14="http://schemas.microsoft.com/office/drawing/2010/main" xmlns="" w="9525">
+              <a14:hiddenLine xmlns="" xmlns:a14="http://schemas.microsoft.com/office/drawing/2010/main" w="9525">
                 <a:solidFill>
                   <a:srgbClr val="000000"/>
                 </a:solidFill>
@@ -10370,14 +10412,14 @@
           <a:noFill/>
           <a:extLst>
             <a:ext uri="{909E8E84-426E-40dd-AFC4-6F175D3DCCD1}">
-              <a14:hiddenFill xmlns:a14="http://schemas.microsoft.com/office/drawing/2010/main" xmlns="">
+              <a14:hiddenFill xmlns="" xmlns:a14="http://schemas.microsoft.com/office/drawing/2010/main">
                 <a:solidFill>
                   <a:srgbClr val="FFFFFF"/>
                 </a:solidFill>
               </a14:hiddenFill>
             </a:ext>
             <a:ext uri="{91240B29-F687-4f45-9708-019B960494DF}">
-              <a14:hiddenLine xmlns:a14="http://schemas.microsoft.com/office/drawing/2010/main" xmlns="" w="9525">
+              <a14:hiddenLine xmlns="" xmlns:a14="http://schemas.microsoft.com/office/drawing/2010/main" w="9525">
                 <a:solidFill>
                   <a:srgbClr val="000000"/>
                 </a:solidFill>
@@ -11102,14 +11144,14 @@
           <a:noFill/>
           <a:extLst>
             <a:ext uri="{909E8E84-426E-40dd-AFC4-6F175D3DCCD1}">
-              <a14:hiddenFill xmlns="" xmlns:a14="http://schemas.microsoft.com/office/drawing/2010/main">
+              <a14:hiddenFill xmlns:a14="http://schemas.microsoft.com/office/drawing/2010/main" xmlns="">
                 <a:solidFill>
                   <a:srgbClr val="FFFFFF"/>
                 </a:solidFill>
               </a14:hiddenFill>
             </a:ext>
             <a:ext uri="{91240B29-F687-4f45-9708-019B960494DF}">
-              <a14:hiddenLine xmlns="" xmlns:a14="http://schemas.microsoft.com/office/drawing/2010/main" w="9525">
+              <a14:hiddenLine xmlns:a14="http://schemas.microsoft.com/office/drawing/2010/main" xmlns="" w="9525">
                 <a:solidFill>
                   <a:srgbClr val="000000"/>
                 </a:solidFill>
@@ -11680,14 +11722,14 @@
           <a:noFill/>
           <a:extLst>
             <a:ext uri="{909E8E84-426E-40dd-AFC4-6F175D3DCCD1}">
-              <a14:hiddenFill xmlns="" xmlns:a14="http://schemas.microsoft.com/office/drawing/2010/main">
+              <a14:hiddenFill xmlns:a14="http://schemas.microsoft.com/office/drawing/2010/main" xmlns="">
                 <a:solidFill>
                   <a:srgbClr val="FFFFFF"/>
                 </a:solidFill>
               </a14:hiddenFill>
             </a:ext>
             <a:ext uri="{91240B29-F687-4f45-9708-019B960494DF}">
-              <a14:hiddenLine xmlns="" xmlns:a14="http://schemas.microsoft.com/office/drawing/2010/main" w="9525">
+              <a14:hiddenLine xmlns:a14="http://schemas.microsoft.com/office/drawing/2010/main" xmlns="" w="9525">
                 <a:solidFill>
                   <a:srgbClr val="000000"/>
                 </a:solidFill>
@@ -12172,14 +12214,14 @@
           <a:noFill/>
           <a:extLst>
             <a:ext uri="{909E8E84-426E-40dd-AFC4-6F175D3DCCD1}">
-              <a14:hiddenFill xmlns="" xmlns:a14="http://schemas.microsoft.com/office/drawing/2010/main">
+              <a14:hiddenFill xmlns:a14="http://schemas.microsoft.com/office/drawing/2010/main" xmlns="">
                 <a:solidFill>
                   <a:srgbClr val="FFFFFF"/>
                 </a:solidFill>
               </a14:hiddenFill>
             </a:ext>
             <a:ext uri="{91240B29-F687-4f45-9708-019B960494DF}">
-              <a14:hiddenLine xmlns="" xmlns:a14="http://schemas.microsoft.com/office/drawing/2010/main" w="9525">
+              <a14:hiddenLine xmlns:a14="http://schemas.microsoft.com/office/drawing/2010/main" xmlns="" w="9525">
                 <a:solidFill>
                   <a:srgbClr val="000000"/>
                 </a:solidFill>
@@ -12374,14 +12416,14 @@
           </a:ln>
           <a:extLst>
             <a:ext uri="{909E8E84-426E-40dd-AFC4-6F175D3DCCD1}">
-              <a14:hiddenFill xmlns="" xmlns:a14="http://schemas.microsoft.com/office/drawing/2010/main">
+              <a14:hiddenFill xmlns:a14="http://schemas.microsoft.com/office/drawing/2010/main" xmlns="">
                 <a:solidFill>
                   <a:srgbClr val="FFFFFF"/>
                 </a:solidFill>
               </a14:hiddenFill>
             </a:ext>
             <a:ext uri="{91240B29-F687-4f45-9708-019B960494DF}">
-              <a14:hiddenLine xmlns="" xmlns:a14="http://schemas.microsoft.com/office/drawing/2010/main" w="9525">
+              <a14:hiddenLine xmlns:a14="http://schemas.microsoft.com/office/drawing/2010/main" xmlns="" w="9525">
                 <a:solidFill>
                   <a:srgbClr val="000000"/>
                 </a:solidFill>
@@ -12815,14 +12857,14 @@
           <a:noFill/>
           <a:extLst>
             <a:ext uri="{909E8E84-426E-40dd-AFC4-6F175D3DCCD1}">
-              <a14:hiddenFill xmlns:a14="http://schemas.microsoft.com/office/drawing/2010/main" xmlns="">
+              <a14:hiddenFill xmlns="" xmlns:a14="http://schemas.microsoft.com/office/drawing/2010/main">
                 <a:solidFill>
                   <a:srgbClr val="FFFFFF"/>
                 </a:solidFill>
               </a14:hiddenFill>
             </a:ext>
             <a:ext uri="{91240B29-F687-4f45-9708-019B960494DF}">
-              <a14:hiddenLine xmlns:a14="http://schemas.microsoft.com/office/drawing/2010/main" xmlns="" w="9525">
+              <a14:hiddenLine xmlns="" xmlns:a14="http://schemas.microsoft.com/office/drawing/2010/main" w="9525">
                 <a:solidFill>
                   <a:srgbClr val="000000"/>
                 </a:solidFill>
@@ -13318,14 +13360,14 @@
           <a:noFill/>
           <a:extLst>
             <a:ext uri="{909E8E84-426E-40dd-AFC4-6F175D3DCCD1}">
-              <a14:hiddenFill xmlns="" xmlns:a14="http://schemas.microsoft.com/office/drawing/2010/main">
+              <a14:hiddenFill xmlns:a14="http://schemas.microsoft.com/office/drawing/2010/main" xmlns="">
                 <a:solidFill>
                   <a:srgbClr val="FFFFFF"/>
                 </a:solidFill>
               </a14:hiddenFill>
             </a:ext>
             <a:ext uri="{91240B29-F687-4f45-9708-019B960494DF}">
-              <a14:hiddenLine xmlns="" xmlns:a14="http://schemas.microsoft.com/office/drawing/2010/main" w="9525">
+              <a14:hiddenLine xmlns:a14="http://schemas.microsoft.com/office/drawing/2010/main" xmlns="" w="9525">
                 <a:solidFill>
                   <a:srgbClr val="000000"/>
                 </a:solidFill>
@@ -13888,14 +13930,14 @@
           <a:noFill/>
           <a:extLst>
             <a:ext uri="{909E8E84-426E-40dd-AFC4-6F175D3DCCD1}">
-              <a14:hiddenFill xmlns="" xmlns:a14="http://schemas.microsoft.com/office/drawing/2010/main">
+              <a14:hiddenFill xmlns:a14="http://schemas.microsoft.com/office/drawing/2010/main" xmlns="">
                 <a:solidFill>
                   <a:srgbClr val="FFFFFF"/>
                 </a:solidFill>
               </a14:hiddenFill>
             </a:ext>
             <a:ext uri="{91240B29-F687-4f45-9708-019B960494DF}">
-              <a14:hiddenLine xmlns="" xmlns:a14="http://schemas.microsoft.com/office/drawing/2010/main" w="9525">
+              <a14:hiddenLine xmlns:a14="http://schemas.microsoft.com/office/drawing/2010/main" xmlns="" w="9525">
                 <a:solidFill>
                   <a:srgbClr val="000000"/>
                 </a:solidFill>
@@ -14878,14 +14920,14 @@
           <a:noFill/>
           <a:extLst>
             <a:ext uri="{909E8E84-426E-40dd-AFC4-6F175D3DCCD1}">
-              <a14:hiddenFill xmlns="" xmlns:a14="http://schemas.microsoft.com/office/drawing/2010/main">
+              <a14:hiddenFill xmlns:a14="http://schemas.microsoft.com/office/drawing/2010/main" xmlns="">
                 <a:solidFill>
                   <a:srgbClr val="FFFFFF"/>
                 </a:solidFill>
               </a14:hiddenFill>
             </a:ext>
             <a:ext uri="{91240B29-F687-4f45-9708-019B960494DF}">
-              <a14:hiddenLine xmlns="" xmlns:a14="http://schemas.microsoft.com/office/drawing/2010/main" w="9525">
+              <a14:hiddenLine xmlns:a14="http://schemas.microsoft.com/office/drawing/2010/main" xmlns="" w="9525">
                 <a:solidFill>
                   <a:srgbClr val="000000"/>
                 </a:solidFill>
@@ -15624,14 +15666,14 @@
           <a:noFill/>
           <a:extLst>
             <a:ext uri="{909E8E84-426E-40dd-AFC4-6F175D3DCCD1}">
-              <a14:hiddenFill xmlns="" xmlns:a14="http://schemas.microsoft.com/office/drawing/2010/main">
+              <a14:hiddenFill xmlns:a14="http://schemas.microsoft.com/office/drawing/2010/main" xmlns="">
                 <a:solidFill>
                   <a:srgbClr val="FFFFFF"/>
                 </a:solidFill>
               </a14:hiddenFill>
             </a:ext>
             <a:ext uri="{91240B29-F687-4f45-9708-019B960494DF}">
-              <a14:hiddenLine xmlns="" xmlns:a14="http://schemas.microsoft.com/office/drawing/2010/main" w="9525">
+              <a14:hiddenLine xmlns:a14="http://schemas.microsoft.com/office/drawing/2010/main" xmlns="" w="9525">
                 <a:solidFill>
                   <a:srgbClr val="000000"/>
                 </a:solidFill>
@@ -15784,14 +15826,14 @@
           </a:ln>
           <a:extLst>
             <a:ext uri="{909E8E84-426E-40dd-AFC4-6F175D3DCCD1}">
-              <a14:hiddenFill xmlns="" xmlns:a14="http://schemas.microsoft.com/office/drawing/2010/main">
+              <a14:hiddenFill xmlns:a14="http://schemas.microsoft.com/office/drawing/2010/main" xmlns="">
                 <a:solidFill>
                   <a:srgbClr val="FFFFFF"/>
                 </a:solidFill>
               </a14:hiddenFill>
             </a:ext>
             <a:ext uri="{91240B29-F687-4f45-9708-019B960494DF}">
-              <a14:hiddenLine xmlns="" xmlns:a14="http://schemas.microsoft.com/office/drawing/2010/main" w="9525">
+              <a14:hiddenLine xmlns:a14="http://schemas.microsoft.com/office/drawing/2010/main" xmlns="" w="9525">
                 <a:solidFill>
                   <a:srgbClr val="000000"/>
                 </a:solidFill>
@@ -15929,14 +15971,14 @@
           </a:ln>
           <a:extLst>
             <a:ext uri="{909E8E84-426E-40dd-AFC4-6F175D3DCCD1}">
-              <a14:hiddenFill xmlns="" xmlns:a14="http://schemas.microsoft.com/office/drawing/2010/main">
+              <a14:hiddenFill xmlns:a14="http://schemas.microsoft.com/office/drawing/2010/main" xmlns="">
                 <a:solidFill>
                   <a:srgbClr val="FFFFFF"/>
                 </a:solidFill>
               </a14:hiddenFill>
             </a:ext>
             <a:ext uri="{91240B29-F687-4f45-9708-019B960494DF}">
-              <a14:hiddenLine xmlns="" xmlns:a14="http://schemas.microsoft.com/office/drawing/2010/main" w="9525">
+              <a14:hiddenLine xmlns:a14="http://schemas.microsoft.com/office/drawing/2010/main" xmlns="" w="9525">
                 <a:solidFill>
                   <a:srgbClr val="000000"/>
                 </a:solidFill>
@@ -16606,14 +16648,14 @@
         <p:spPr>
           <a:extLst>
             <a:ext uri="{909E8E84-426E-40dd-AFC4-6F175D3DCCD1}">
-              <a14:hiddenFill xmlns:a14="http://schemas.microsoft.com/office/drawing/2010/main" xmlns="">
+              <a14:hiddenFill xmlns="" xmlns:a14="http://schemas.microsoft.com/office/drawing/2010/main">
                 <a:solidFill>
                   <a:srgbClr val="FFFFFF"/>
                 </a:solidFill>
               </a14:hiddenFill>
             </a:ext>
             <a:ext uri="{91240B29-F687-4f45-9708-019B960494DF}">
-              <a14:hiddenLine xmlns:a14="http://schemas.microsoft.com/office/drawing/2010/main" xmlns="" w="9525">
+              <a14:hiddenLine xmlns="" xmlns:a14="http://schemas.microsoft.com/office/drawing/2010/main" w="9525">
                 <a:solidFill>
                   <a:srgbClr val="000000"/>
                 </a:solidFill>
@@ -16825,14 +16867,14 @@
           </a:ln>
           <a:extLst>
             <a:ext uri="{909E8E84-426E-40dd-AFC4-6F175D3DCCD1}">
-              <a14:hiddenFill xmlns:a14="http://schemas.microsoft.com/office/drawing/2010/main" xmlns="">
+              <a14:hiddenFill xmlns="" xmlns:a14="http://schemas.microsoft.com/office/drawing/2010/main">
                 <a:solidFill>
                   <a:srgbClr val="FFFFFF"/>
                 </a:solidFill>
               </a14:hiddenFill>
             </a:ext>
             <a:ext uri="{91240B29-F687-4f45-9708-019B960494DF}">
-              <a14:hiddenLine xmlns:a14="http://schemas.microsoft.com/office/drawing/2010/main" xmlns="" w="9525">
+              <a14:hiddenLine xmlns="" xmlns:a14="http://schemas.microsoft.com/office/drawing/2010/main" w="9525">
                 <a:solidFill>
                   <a:srgbClr val="000000"/>
                 </a:solidFill>
@@ -16842,7 +16884,7 @@
               </a14:hiddenLine>
             </a:ext>
             <a:ext uri="{FAA26D3D-D897-4be2-8F04-BA451C77F1D7}">
-              <ma14:placeholderFlag xmlns:ma14="http://schemas.microsoft.com/office/mac/drawingml/2011/main" xmlns="" val="1"/>
+              <ma14:placeholderFlag xmlns="" xmlns:ma14="http://schemas.microsoft.com/office/mac/drawingml/2011/main" val="1"/>
             </a:ext>
           </a:extLst>
         </p:spPr>
@@ -16995,14 +17037,14 @@
           <a:effectLst/>
           <a:extLst>
             <a:ext uri="{909E8E84-426E-40dd-AFC4-6F175D3DCCD1}">
-              <a14:hiddenFill xmlns:a14="http://schemas.microsoft.com/office/drawing/2010/main" xmlns="">
+              <a14:hiddenFill xmlns="" xmlns:a14="http://schemas.microsoft.com/office/drawing/2010/main">
                 <a:solidFill>
                   <a:schemeClr val="accent1"/>
                 </a:solidFill>
               </a14:hiddenFill>
             </a:ext>
             <a:ext uri="{AF507438-7753-43e0-B8FC-AC1667EBCBE1}">
-              <a14:hiddenEffects xmlns:a14="http://schemas.microsoft.com/office/drawing/2010/main" xmlns="">
+              <a14:hiddenEffects xmlns="" xmlns:a14="http://schemas.microsoft.com/office/drawing/2010/main">
                 <a:effectLst>
                   <a:outerShdw blurRad="63500" dist="35921" dir="2700000" algn="ctr" rotWithShape="0">
                     <a:schemeClr val="bg2"/>
@@ -17086,14 +17128,14 @@
           <a:effectLst/>
           <a:extLst>
             <a:ext uri="{909E8E84-426E-40dd-AFC4-6F175D3DCCD1}">
-              <a14:hiddenFill xmlns:a14="http://schemas.microsoft.com/office/drawing/2010/main" xmlns="">
+              <a14:hiddenFill xmlns="" xmlns:a14="http://schemas.microsoft.com/office/drawing/2010/main">
                 <a:solidFill>
                   <a:schemeClr val="accent1"/>
                 </a:solidFill>
               </a14:hiddenFill>
             </a:ext>
             <a:ext uri="{AF507438-7753-43e0-B8FC-AC1667EBCBE1}">
-              <a14:hiddenEffects xmlns:a14="http://schemas.microsoft.com/office/drawing/2010/main" xmlns="">
+              <a14:hiddenEffects xmlns="" xmlns:a14="http://schemas.microsoft.com/office/drawing/2010/main">
                 <a:effectLst>
                   <a:outerShdw blurRad="63500" dist="35921" dir="2700000" algn="ctr" rotWithShape="0">
                     <a:schemeClr val="bg2"/>
@@ -18686,14 +18728,14 @@
           <a:effectLst/>
           <a:extLst>
             <a:ext uri="{909E8E84-426E-40dd-AFC4-6F175D3DCCD1}">
-              <a14:hiddenFill xmlns="" xmlns:a14="http://schemas.microsoft.com/office/drawing/2010/main">
+              <a14:hiddenFill xmlns:a14="http://schemas.microsoft.com/office/drawing/2010/main" xmlns="">
                 <a:solidFill>
                   <a:schemeClr val="accent1"/>
                 </a:solidFill>
               </a14:hiddenFill>
             </a:ext>
             <a:ext uri="{AF507438-7753-43e0-B8FC-AC1667EBCBE1}">
-              <a14:hiddenEffects xmlns="" xmlns:a14="http://schemas.microsoft.com/office/drawing/2010/main">
+              <a14:hiddenEffects xmlns:a14="http://schemas.microsoft.com/office/drawing/2010/main" xmlns="">
                 <a:effectLst>
                   <a:outerShdw blurRad="63500" dist="35921" dir="2700000" algn="ctr" rotWithShape="0">
                     <a:schemeClr val="bg2"/>
@@ -18731,14 +18773,14 @@
           <a:effectLst/>
           <a:extLst>
             <a:ext uri="{909E8E84-426E-40dd-AFC4-6F175D3DCCD1}">
-              <a14:hiddenFill xmlns="" xmlns:a14="http://schemas.microsoft.com/office/drawing/2010/main">
+              <a14:hiddenFill xmlns:a14="http://schemas.microsoft.com/office/drawing/2010/main" xmlns="">
                 <a:solidFill>
                   <a:schemeClr val="accent1"/>
                 </a:solidFill>
               </a14:hiddenFill>
             </a:ext>
             <a:ext uri="{AF507438-7753-43e0-B8FC-AC1667EBCBE1}">
-              <a14:hiddenEffects xmlns="" xmlns:a14="http://schemas.microsoft.com/office/drawing/2010/main">
+              <a14:hiddenEffects xmlns:a14="http://schemas.microsoft.com/office/drawing/2010/main" xmlns="">
                 <a:effectLst>
                   <a:outerShdw blurRad="63500" dist="35921" dir="2700000" algn="ctr" rotWithShape="0">
                     <a:schemeClr val="bg2"/>
@@ -18776,14 +18818,14 @@
           <a:effectLst/>
           <a:extLst>
             <a:ext uri="{909E8E84-426E-40dd-AFC4-6F175D3DCCD1}">
-              <a14:hiddenFill xmlns="" xmlns:a14="http://schemas.microsoft.com/office/drawing/2010/main">
+              <a14:hiddenFill xmlns:a14="http://schemas.microsoft.com/office/drawing/2010/main" xmlns="">
                 <a:solidFill>
                   <a:schemeClr val="accent1"/>
                 </a:solidFill>
               </a14:hiddenFill>
             </a:ext>
             <a:ext uri="{AF507438-7753-43e0-B8FC-AC1667EBCBE1}">
-              <a14:hiddenEffects xmlns="" xmlns:a14="http://schemas.microsoft.com/office/drawing/2010/main">
+              <a14:hiddenEffects xmlns:a14="http://schemas.microsoft.com/office/drawing/2010/main" xmlns="">
                 <a:effectLst>
                   <a:outerShdw blurRad="63500" dist="35921" dir="2700000" algn="ctr" rotWithShape="0">
                     <a:schemeClr val="bg2"/>
@@ -21571,14 +21613,14 @@
           <a:noFill/>
           <a:extLst>
             <a:ext uri="{909E8E84-426E-40dd-AFC4-6F175D3DCCD1}">
-              <a14:hiddenFill xmlns="" xmlns:a14="http://schemas.microsoft.com/office/drawing/2010/main">
+              <a14:hiddenFill xmlns:a14="http://schemas.microsoft.com/office/drawing/2010/main" xmlns="">
                 <a:solidFill>
                   <a:srgbClr val="FFFFFF"/>
                 </a:solidFill>
               </a14:hiddenFill>
             </a:ext>
             <a:ext uri="{91240B29-F687-4f45-9708-019B960494DF}">
-              <a14:hiddenLine xmlns="" xmlns:a14="http://schemas.microsoft.com/office/drawing/2010/main" w="9525">
+              <a14:hiddenLine xmlns:a14="http://schemas.microsoft.com/office/drawing/2010/main" xmlns="" w="9525">
                 <a:solidFill>
                   <a:srgbClr val="000000"/>
                 </a:solidFill>
@@ -21731,14 +21773,14 @@
           </a:ln>
           <a:extLst>
             <a:ext uri="{909E8E84-426E-40dd-AFC4-6F175D3DCCD1}">
-              <a14:hiddenFill xmlns="" xmlns:a14="http://schemas.microsoft.com/office/drawing/2010/main">
+              <a14:hiddenFill xmlns:a14="http://schemas.microsoft.com/office/drawing/2010/main" xmlns="">
                 <a:solidFill>
                   <a:srgbClr val="FFFFFF"/>
                 </a:solidFill>
               </a14:hiddenFill>
             </a:ext>
             <a:ext uri="{91240B29-F687-4f45-9708-019B960494DF}">
-              <a14:hiddenLine xmlns="" xmlns:a14="http://schemas.microsoft.com/office/drawing/2010/main" w="9525">
+              <a14:hiddenLine xmlns:a14="http://schemas.microsoft.com/office/drawing/2010/main" xmlns="" w="9525">
                 <a:solidFill>
                   <a:srgbClr val="000000"/>
                 </a:solidFill>
@@ -22814,14 +22856,14 @@
           <a:noFill/>
           <a:extLst>
             <a:ext uri="{909E8E84-426E-40dd-AFC4-6F175D3DCCD1}">
-              <a14:hiddenFill xmlns="" xmlns:a14="http://schemas.microsoft.com/office/drawing/2010/main">
+              <a14:hiddenFill xmlns:a14="http://schemas.microsoft.com/office/drawing/2010/main" xmlns="">
                 <a:solidFill>
                   <a:srgbClr val="FFFFFF"/>
                 </a:solidFill>
               </a14:hiddenFill>
             </a:ext>
             <a:ext uri="{91240B29-F687-4f45-9708-019B960494DF}">
-              <a14:hiddenLine xmlns="" xmlns:a14="http://schemas.microsoft.com/office/drawing/2010/main" w="9525">
+              <a14:hiddenLine xmlns:a14="http://schemas.microsoft.com/office/drawing/2010/main" xmlns="" w="9525">
                 <a:solidFill>
                   <a:srgbClr val="000000"/>
                 </a:solidFill>
@@ -23258,14 +23300,14 @@
           <a:noFill/>
           <a:extLst>
             <a:ext uri="{909E8E84-426E-40dd-AFC4-6F175D3DCCD1}">
-              <a14:hiddenFill xmlns="" xmlns:a14="http://schemas.microsoft.com/office/drawing/2010/main">
+              <a14:hiddenFill xmlns:a14="http://schemas.microsoft.com/office/drawing/2010/main" xmlns="">
                 <a:solidFill>
                   <a:srgbClr val="FFFFFF"/>
                 </a:solidFill>
               </a14:hiddenFill>
             </a:ext>
             <a:ext uri="{91240B29-F687-4f45-9708-019B960494DF}">
-              <a14:hiddenLine xmlns="" xmlns:a14="http://schemas.microsoft.com/office/drawing/2010/main" w="9525">
+              <a14:hiddenLine xmlns:a14="http://schemas.microsoft.com/office/drawing/2010/main" xmlns="" w="9525">
                 <a:solidFill>
                   <a:srgbClr val="000000"/>
                 </a:solidFill>
@@ -23460,14 +23502,14 @@
           </a:ln>
           <a:extLst>
             <a:ext uri="{909E8E84-426E-40dd-AFC4-6F175D3DCCD1}">
-              <a14:hiddenFill xmlns="" xmlns:a14="http://schemas.microsoft.com/office/drawing/2010/main">
+              <a14:hiddenFill xmlns:a14="http://schemas.microsoft.com/office/drawing/2010/main" xmlns="">
                 <a:solidFill>
                   <a:srgbClr val="FFFFFF"/>
                 </a:solidFill>
               </a14:hiddenFill>
             </a:ext>
             <a:ext uri="{91240B29-F687-4f45-9708-019B960494DF}">
-              <a14:hiddenLine xmlns="" xmlns:a14="http://schemas.microsoft.com/office/drawing/2010/main" w="9525">
+              <a14:hiddenLine xmlns:a14="http://schemas.microsoft.com/office/drawing/2010/main" xmlns="" w="9525">
                 <a:solidFill>
                   <a:srgbClr val="000000"/>
                 </a:solidFill>
@@ -24200,14 +24242,14 @@
           <a:noFill/>
           <a:extLst>
             <a:ext uri="{909E8E84-426E-40dd-AFC4-6F175D3DCCD1}">
-              <a14:hiddenFill xmlns="" xmlns:a14="http://schemas.microsoft.com/office/drawing/2010/main">
+              <a14:hiddenFill xmlns:a14="http://schemas.microsoft.com/office/drawing/2010/main" xmlns="">
                 <a:solidFill>
                   <a:srgbClr val="FFFFFF"/>
                 </a:solidFill>
               </a14:hiddenFill>
             </a:ext>
             <a:ext uri="{91240B29-F687-4f45-9708-019B960494DF}">
-              <a14:hiddenLine xmlns="" xmlns:a14="http://schemas.microsoft.com/office/drawing/2010/main" w="9525">
+              <a14:hiddenLine xmlns:a14="http://schemas.microsoft.com/office/drawing/2010/main" xmlns="" w="9525">
                 <a:solidFill>
                   <a:srgbClr val="000000"/>
                 </a:solidFill>
@@ -24360,14 +24402,14 @@
           </a:ln>
           <a:extLst>
             <a:ext uri="{909E8E84-426E-40dd-AFC4-6F175D3DCCD1}">
-              <a14:hiddenFill xmlns="" xmlns:a14="http://schemas.microsoft.com/office/drawing/2010/main">
+              <a14:hiddenFill xmlns:a14="http://schemas.microsoft.com/office/drawing/2010/main" xmlns="">
                 <a:solidFill>
                   <a:srgbClr val="FFFFFF"/>
                 </a:solidFill>
               </a14:hiddenFill>
             </a:ext>
             <a:ext uri="{91240B29-F687-4f45-9708-019B960494DF}">
-              <a14:hiddenLine xmlns="" xmlns:a14="http://schemas.microsoft.com/office/drawing/2010/main" w="9525">
+              <a14:hiddenLine xmlns:a14="http://schemas.microsoft.com/office/drawing/2010/main" xmlns="" w="9525">
                 <a:solidFill>
                   <a:srgbClr val="000000"/>
                 </a:solidFill>
@@ -24553,14 +24595,14 @@
           <a:noFill/>
           <a:extLst>
             <a:ext uri="{909E8E84-426E-40dd-AFC4-6F175D3DCCD1}">
-              <a14:hiddenFill xmlns="" xmlns:a14="http://schemas.microsoft.com/office/drawing/2010/main">
+              <a14:hiddenFill xmlns:a14="http://schemas.microsoft.com/office/drawing/2010/main" xmlns="">
                 <a:solidFill>
                   <a:srgbClr val="FFFFFF"/>
                 </a:solidFill>
               </a14:hiddenFill>
             </a:ext>
             <a:ext uri="{91240B29-F687-4f45-9708-019B960494DF}">
-              <a14:hiddenLine xmlns="" xmlns:a14="http://schemas.microsoft.com/office/drawing/2010/main" w="9525">
+              <a14:hiddenLine xmlns:a14="http://schemas.microsoft.com/office/drawing/2010/main" xmlns="" w="9525">
                 <a:solidFill>
                   <a:srgbClr val="000000"/>
                 </a:solidFill>
@@ -25148,14 +25190,14 @@
           <a:noFill/>
           <a:extLst>
             <a:ext uri="{909E8E84-426E-40dd-AFC4-6F175D3DCCD1}">
-              <a14:hiddenFill xmlns="" xmlns:a14="http://schemas.microsoft.com/office/drawing/2010/main">
+              <a14:hiddenFill xmlns:a14="http://schemas.microsoft.com/office/drawing/2010/main" xmlns="">
                 <a:solidFill>
                   <a:srgbClr val="FFFFFF"/>
                 </a:solidFill>
               </a14:hiddenFill>
             </a:ext>
             <a:ext uri="{91240B29-F687-4f45-9708-019B960494DF}">
-              <a14:hiddenLine xmlns="" xmlns:a14="http://schemas.microsoft.com/office/drawing/2010/main" w="9525">
+              <a14:hiddenLine xmlns:a14="http://schemas.microsoft.com/office/drawing/2010/main" xmlns="" w="9525">
                 <a:solidFill>
                   <a:srgbClr val="000000"/>
                 </a:solidFill>
@@ -26032,14 +26074,14 @@
         <p:spPr>
           <a:extLst>
             <a:ext uri="{909E8E84-426E-40dd-AFC4-6F175D3DCCD1}">
-              <a14:hiddenFill xmlns="" xmlns:a14="http://schemas.microsoft.com/office/drawing/2010/main">
+              <a14:hiddenFill xmlns:a14="http://schemas.microsoft.com/office/drawing/2010/main" xmlns="">
                 <a:solidFill>
                   <a:srgbClr val="FFFFFF"/>
                 </a:solidFill>
               </a14:hiddenFill>
             </a:ext>
             <a:ext uri="{91240B29-F687-4f45-9708-019B960494DF}">
-              <a14:hiddenLine xmlns="" xmlns:a14="http://schemas.microsoft.com/office/drawing/2010/main" w="9525">
+              <a14:hiddenLine xmlns:a14="http://schemas.microsoft.com/office/drawing/2010/main" xmlns="" w="9525">
                 <a:solidFill>
                   <a:srgbClr val="000000"/>
                 </a:solidFill>
@@ -26220,14 +26262,14 @@
           </a:ln>
           <a:extLst>
             <a:ext uri="{909E8E84-426E-40dd-AFC4-6F175D3DCCD1}">
-              <a14:hiddenFill xmlns="" xmlns:a14="http://schemas.microsoft.com/office/drawing/2010/main">
+              <a14:hiddenFill xmlns:a14="http://schemas.microsoft.com/office/drawing/2010/main" xmlns="">
                 <a:solidFill>
                   <a:srgbClr val="FFFFFF"/>
                 </a:solidFill>
               </a14:hiddenFill>
             </a:ext>
             <a:ext uri="{91240B29-F687-4f45-9708-019B960494DF}">
-              <a14:hiddenLine xmlns="" xmlns:a14="http://schemas.microsoft.com/office/drawing/2010/main" w="9525">
+              <a14:hiddenLine xmlns:a14="http://schemas.microsoft.com/office/drawing/2010/main" xmlns="" w="9525">
                 <a:solidFill>
                   <a:srgbClr val="000000"/>
                 </a:solidFill>
@@ -26237,7 +26279,7 @@
               </a14:hiddenLine>
             </a:ext>
             <a:ext uri="{FAA26D3D-D897-4be2-8F04-BA451C77F1D7}">
-              <ma14:placeholderFlag xmlns="" xmlns:ma14="http://schemas.microsoft.com/office/mac/drawingml/2011/main" val="1"/>
+              <ma14:placeholderFlag xmlns:ma14="http://schemas.microsoft.com/office/mac/drawingml/2011/main" xmlns="" val="1"/>
             </a:ext>
           </a:extLst>
         </p:spPr>
@@ -27099,14 +27141,14 @@
           <a:noFill/>
           <a:extLst>
             <a:ext uri="{909E8E84-426E-40dd-AFC4-6F175D3DCCD1}">
-              <a14:hiddenFill xmlns="" xmlns:a14="http://schemas.microsoft.com/office/drawing/2010/main">
+              <a14:hiddenFill xmlns:a14="http://schemas.microsoft.com/office/drawing/2010/main" xmlns="">
                 <a:solidFill>
                   <a:srgbClr val="FFFFFF"/>
                 </a:solidFill>
               </a14:hiddenFill>
             </a:ext>
             <a:ext uri="{91240B29-F687-4f45-9708-019B960494DF}">
-              <a14:hiddenLine xmlns="" xmlns:a14="http://schemas.microsoft.com/office/drawing/2010/main" w="9525">
+              <a14:hiddenLine xmlns:a14="http://schemas.microsoft.com/office/drawing/2010/main" xmlns="" w="9525">
                 <a:solidFill>
                   <a:srgbClr val="000000"/>
                 </a:solidFill>
@@ -27860,14 +27902,14 @@
         <p:spPr>
           <a:extLst>
             <a:ext uri="{909E8E84-426E-40dd-AFC4-6F175D3DCCD1}">
-              <a14:hiddenFill xmlns="" xmlns:a14="http://schemas.microsoft.com/office/drawing/2010/main">
+              <a14:hiddenFill xmlns:a14="http://schemas.microsoft.com/office/drawing/2010/main" xmlns="">
                 <a:solidFill>
                   <a:srgbClr val="FFFFFF"/>
                 </a:solidFill>
               </a14:hiddenFill>
             </a:ext>
             <a:ext uri="{91240B29-F687-4f45-9708-019B960494DF}">
-              <a14:hiddenLine xmlns="" xmlns:a14="http://schemas.microsoft.com/office/drawing/2010/main" w="9525">
+              <a14:hiddenLine xmlns:a14="http://schemas.microsoft.com/office/drawing/2010/main" xmlns="" w="9525">
                 <a:solidFill>
                   <a:srgbClr val="000000"/>
                 </a:solidFill>
@@ -28101,14 +28143,14 @@
         <p:spPr>
           <a:extLst>
             <a:ext uri="{909E8E84-426E-40dd-AFC4-6F175D3DCCD1}">
-              <a14:hiddenFill xmlns:a14="http://schemas.microsoft.com/office/drawing/2010/main" xmlns="">
+              <a14:hiddenFill xmlns="" xmlns:a14="http://schemas.microsoft.com/office/drawing/2010/main">
                 <a:solidFill>
                   <a:srgbClr val="FFFFFF"/>
                 </a:solidFill>
               </a14:hiddenFill>
             </a:ext>
             <a:ext uri="{91240B29-F687-4f45-9708-019B960494DF}">
-              <a14:hiddenLine xmlns:a14="http://schemas.microsoft.com/office/drawing/2010/main" xmlns="" w="9525">
+              <a14:hiddenLine xmlns="" xmlns:a14="http://schemas.microsoft.com/office/drawing/2010/main" w="9525">
                 <a:solidFill>
                   <a:srgbClr val="000000"/>
                 </a:solidFill>
@@ -28289,14 +28331,14 @@
           </a:ln>
           <a:extLst>
             <a:ext uri="{909E8E84-426E-40dd-AFC4-6F175D3DCCD1}">
-              <a14:hiddenFill xmlns:a14="http://schemas.microsoft.com/office/drawing/2010/main" xmlns="">
+              <a14:hiddenFill xmlns="" xmlns:a14="http://schemas.microsoft.com/office/drawing/2010/main">
                 <a:solidFill>
                   <a:srgbClr val="FFFFFF"/>
                 </a:solidFill>
               </a14:hiddenFill>
             </a:ext>
             <a:ext uri="{91240B29-F687-4f45-9708-019B960494DF}">
-              <a14:hiddenLine xmlns:a14="http://schemas.microsoft.com/office/drawing/2010/main" xmlns="" w="9525">
+              <a14:hiddenLine xmlns="" xmlns:a14="http://schemas.microsoft.com/office/drawing/2010/main" w="9525">
                 <a:solidFill>
                   <a:srgbClr val="000000"/>
                 </a:solidFill>
@@ -28306,7 +28348,7 @@
               </a14:hiddenLine>
             </a:ext>
             <a:ext uri="{FAA26D3D-D897-4be2-8F04-BA451C77F1D7}">
-              <ma14:placeholderFlag xmlns:ma14="http://schemas.microsoft.com/office/mac/drawingml/2011/main" xmlns="" val="1"/>
+              <ma14:placeholderFlag xmlns="" xmlns:ma14="http://schemas.microsoft.com/office/mac/drawingml/2011/main" val="1"/>
             </a:ext>
           </a:extLst>
         </p:spPr>
@@ -29007,14 +29049,14 @@
         <p:spPr>
           <a:extLst>
             <a:ext uri="{909E8E84-426E-40dd-AFC4-6F175D3DCCD1}">
-              <a14:hiddenFill xmlns="" xmlns:a14="http://schemas.microsoft.com/office/drawing/2010/main">
+              <a14:hiddenFill xmlns:a14="http://schemas.microsoft.com/office/drawing/2010/main" xmlns="">
                 <a:solidFill>
                   <a:srgbClr val="FFFFFF"/>
                 </a:solidFill>
               </a14:hiddenFill>
             </a:ext>
             <a:ext uri="{91240B29-F687-4f45-9708-019B960494DF}">
-              <a14:hiddenLine xmlns="" xmlns:a14="http://schemas.microsoft.com/office/drawing/2010/main" w="9525">
+              <a14:hiddenLine xmlns:a14="http://schemas.microsoft.com/office/drawing/2010/main" xmlns="" w="9525">
                 <a:solidFill>
                   <a:srgbClr val="000000"/>
                 </a:solidFill>
@@ -29195,14 +29237,14 @@
           </a:ln>
           <a:extLst>
             <a:ext uri="{909E8E84-426E-40dd-AFC4-6F175D3DCCD1}">
-              <a14:hiddenFill xmlns="" xmlns:a14="http://schemas.microsoft.com/office/drawing/2010/main">
+              <a14:hiddenFill xmlns:a14="http://schemas.microsoft.com/office/drawing/2010/main" xmlns="">
                 <a:solidFill>
                   <a:srgbClr val="FFFFFF"/>
                 </a:solidFill>
               </a14:hiddenFill>
             </a:ext>
             <a:ext uri="{91240B29-F687-4f45-9708-019B960494DF}">
-              <a14:hiddenLine xmlns="" xmlns:a14="http://schemas.microsoft.com/office/drawing/2010/main" w="9525">
+              <a14:hiddenLine xmlns:a14="http://schemas.microsoft.com/office/drawing/2010/main" xmlns="" w="9525">
                 <a:solidFill>
                   <a:srgbClr val="000000"/>
                 </a:solidFill>
@@ -29212,7 +29254,7 @@
               </a14:hiddenLine>
             </a:ext>
             <a:ext uri="{FAA26D3D-D897-4be2-8F04-BA451C77F1D7}">
-              <ma14:placeholderFlag xmlns="" xmlns:ma14="http://schemas.microsoft.com/office/mac/drawingml/2011/main" val="1"/>
+              <ma14:placeholderFlag xmlns:ma14="http://schemas.microsoft.com/office/mac/drawingml/2011/main" xmlns="" val="1"/>
             </a:ext>
           </a:extLst>
         </p:spPr>
@@ -30015,14 +30057,14 @@
         <p:spPr>
           <a:extLst>
             <a:ext uri="{909E8E84-426E-40dd-AFC4-6F175D3DCCD1}">
-              <a14:hiddenFill xmlns:a14="http://schemas.microsoft.com/office/drawing/2010/main" xmlns="">
+              <a14:hiddenFill xmlns="" xmlns:a14="http://schemas.microsoft.com/office/drawing/2010/main">
                 <a:solidFill>
                   <a:srgbClr val="FFFFFF"/>
                 </a:solidFill>
               </a14:hiddenFill>
             </a:ext>
             <a:ext uri="{91240B29-F687-4f45-9708-019B960494DF}">
-              <a14:hiddenLine xmlns:a14="http://schemas.microsoft.com/office/drawing/2010/main" xmlns="" w="9525">
+              <a14:hiddenLine xmlns="" xmlns:a14="http://schemas.microsoft.com/office/drawing/2010/main" w="9525">
                 <a:solidFill>
                   <a:srgbClr val="000000"/>
                 </a:solidFill>
@@ -30659,14 +30701,14 @@
         <p:spPr>
           <a:extLst>
             <a:ext uri="{909E8E84-426E-40dd-AFC4-6F175D3DCCD1}">
-              <a14:hiddenFill xmlns="" xmlns:a14="http://schemas.microsoft.com/office/drawing/2010/main">
+              <a14:hiddenFill xmlns:a14="http://schemas.microsoft.com/office/drawing/2010/main" xmlns="">
                 <a:solidFill>
                   <a:srgbClr val="FFFFFF"/>
                 </a:solidFill>
               </a14:hiddenFill>
             </a:ext>
             <a:ext uri="{91240B29-F687-4f45-9708-019B960494DF}">
-              <a14:hiddenLine xmlns="" xmlns:a14="http://schemas.microsoft.com/office/drawing/2010/main" w="9525">
+              <a14:hiddenLine xmlns:a14="http://schemas.microsoft.com/office/drawing/2010/main" xmlns="" w="9525">
                 <a:solidFill>
                   <a:srgbClr val="000000"/>
                 </a:solidFill>
@@ -31584,14 +31626,14 @@
         <p:spPr>
           <a:extLst>
             <a:ext uri="{909E8E84-426E-40dd-AFC4-6F175D3DCCD1}">
-              <a14:hiddenFill xmlns:a14="http://schemas.microsoft.com/office/drawing/2010/main" xmlns="">
+              <a14:hiddenFill xmlns="" xmlns:a14="http://schemas.microsoft.com/office/drawing/2010/main">
                 <a:solidFill>
                   <a:srgbClr val="FFFFFF"/>
                 </a:solidFill>
               </a14:hiddenFill>
             </a:ext>
             <a:ext uri="{91240B29-F687-4f45-9708-019B960494DF}">
-              <a14:hiddenLine xmlns:a14="http://schemas.microsoft.com/office/drawing/2010/main" xmlns="" w="9525">
+              <a14:hiddenLine xmlns="" xmlns:a14="http://schemas.microsoft.com/office/drawing/2010/main" w="9525">
                 <a:solidFill>
                   <a:srgbClr val="000000"/>
                 </a:solidFill>
@@ -32504,14 +32546,14 @@
         <p:spPr>
           <a:extLst>
             <a:ext uri="{909E8E84-426E-40dd-AFC4-6F175D3DCCD1}">
-              <a14:hiddenFill xmlns="" xmlns:a14="http://schemas.microsoft.com/office/drawing/2010/main">
+              <a14:hiddenFill xmlns:a14="http://schemas.microsoft.com/office/drawing/2010/main" xmlns="">
                 <a:solidFill>
                   <a:srgbClr val="FFFFFF"/>
                 </a:solidFill>
               </a14:hiddenFill>
             </a:ext>
             <a:ext uri="{91240B29-F687-4f45-9708-019B960494DF}">
-              <a14:hiddenLine xmlns="" xmlns:a14="http://schemas.microsoft.com/office/drawing/2010/main" w="9525">
+              <a14:hiddenLine xmlns:a14="http://schemas.microsoft.com/office/drawing/2010/main" xmlns="" w="9525">
                 <a:solidFill>
                   <a:srgbClr val="000000"/>
                 </a:solidFill>
